--- a/lectures/Lecture_13/slides/Lecture_13_Attention_and_the_Transformer.pptx
+++ b/lectures/Lecture_13/slides/Lecture_13_Attention_and_the_Transformer.pptx
@@ -7883,8 +7883,8 @@
         </p:nvSpPr>
         <p:spPr>
           <a:xfrm>
-            <a:off x="658368" y="1883664"/>
-            <a:ext cx="146304" cy="146304"/>
+            <a:off x="658368" y="1837944"/>
+            <a:ext cx="128016" cy="128016"/>
           </a:xfrm>
           <a:prstGeom prst="rect">
             <a:avLst/>
@@ -7927,8 +7927,8 @@
         </p:nvSpPr>
         <p:spPr>
           <a:xfrm>
-            <a:off x="1042416" y="1700784"/>
-            <a:ext cx="10490911" cy="640080"/>
+            <a:off x="1024128" y="1691640"/>
+            <a:ext cx="10509199" cy="621792"/>
           </a:xfrm>
           <a:prstGeom prst="rect">
             <a:avLst/>
@@ -7969,8 +7969,8 @@
         </p:nvSpPr>
         <p:spPr>
           <a:xfrm>
-            <a:off x="658368" y="2596896"/>
-            <a:ext cx="146304" cy="146304"/>
+            <a:off x="658368" y="2514600"/>
+            <a:ext cx="128016" cy="128016"/>
           </a:xfrm>
           <a:prstGeom prst="rect">
             <a:avLst/>
@@ -8013,8 +8013,8 @@
         </p:nvSpPr>
         <p:spPr>
           <a:xfrm>
-            <a:off x="1042416" y="2414016"/>
-            <a:ext cx="10490911" cy="640080"/>
+            <a:off x="1024128" y="2368296"/>
+            <a:ext cx="10509199" cy="621792"/>
           </a:xfrm>
           <a:prstGeom prst="rect">
             <a:avLst/>
@@ -8055,8 +8055,8 @@
         </p:nvSpPr>
         <p:spPr>
           <a:xfrm>
-            <a:off x="658368" y="3310128"/>
-            <a:ext cx="146304" cy="146304"/>
+            <a:off x="658368" y="3191256"/>
+            <a:ext cx="128016" cy="128016"/>
           </a:xfrm>
           <a:prstGeom prst="rect">
             <a:avLst/>
@@ -8099,8 +8099,8 @@
         </p:nvSpPr>
         <p:spPr>
           <a:xfrm>
-            <a:off x="1042416" y="3127248"/>
-            <a:ext cx="10490911" cy="640080"/>
+            <a:off x="1024128" y="3044952"/>
+            <a:ext cx="10509199" cy="621792"/>
           </a:xfrm>
           <a:prstGeom prst="rect">
             <a:avLst/>
@@ -8141,8 +8141,8 @@
         </p:nvSpPr>
         <p:spPr>
           <a:xfrm>
-            <a:off x="658368" y="4023360"/>
-            <a:ext cx="146304" cy="146304"/>
+            <a:off x="658368" y="3867912"/>
+            <a:ext cx="128016" cy="128016"/>
           </a:xfrm>
           <a:prstGeom prst="rect">
             <a:avLst/>
@@ -8185,8 +8185,8 @@
         </p:nvSpPr>
         <p:spPr>
           <a:xfrm>
-            <a:off x="1042416" y="3840480"/>
-            <a:ext cx="10490911" cy="640080"/>
+            <a:off x="1024128" y="3721608"/>
+            <a:ext cx="10509199" cy="621792"/>
           </a:xfrm>
           <a:prstGeom prst="rect">
             <a:avLst/>
@@ -8227,8 +8227,8 @@
         </p:nvSpPr>
         <p:spPr>
           <a:xfrm>
-            <a:off x="658368" y="4736592"/>
-            <a:ext cx="146304" cy="146304"/>
+            <a:off x="658368" y="4544568"/>
+            <a:ext cx="128016" cy="128016"/>
           </a:xfrm>
           <a:prstGeom prst="rect">
             <a:avLst/>
@@ -8271,8 +8271,8 @@
         </p:nvSpPr>
         <p:spPr>
           <a:xfrm>
-            <a:off x="1042416" y="4553712"/>
-            <a:ext cx="10490911" cy="640080"/>
+            <a:off x="1024128" y="4398264"/>
+            <a:ext cx="10509199" cy="621792"/>
           </a:xfrm>
           <a:prstGeom prst="rect">
             <a:avLst/>
@@ -8313,8 +8313,8 @@
         </p:nvSpPr>
         <p:spPr>
           <a:xfrm>
-            <a:off x="658368" y="5449824"/>
-            <a:ext cx="146304" cy="146304"/>
+            <a:off x="658368" y="5221224"/>
+            <a:ext cx="128016" cy="128016"/>
           </a:xfrm>
           <a:prstGeom prst="rect">
             <a:avLst/>
@@ -8357,8 +8357,8 @@
         </p:nvSpPr>
         <p:spPr>
           <a:xfrm>
-            <a:off x="1042416" y="5266944"/>
-            <a:ext cx="10490911" cy="640080"/>
+            <a:off x="1024128" y="5074920"/>
+            <a:ext cx="10509199" cy="621792"/>
           </a:xfrm>
           <a:prstGeom prst="rect">
             <a:avLst/>
@@ -9329,8 +9329,8 @@
         </p:nvSpPr>
         <p:spPr>
           <a:xfrm>
-            <a:off x="658368" y="1764792"/>
-            <a:ext cx="502920" cy="457200"/>
+            <a:off x="658368" y="1728216"/>
+            <a:ext cx="502920" cy="530352"/>
           </a:xfrm>
           <a:prstGeom prst="rect">
             <a:avLst/>
@@ -9371,8 +9371,8 @@
         </p:nvSpPr>
         <p:spPr>
           <a:xfrm>
-            <a:off x="1344168" y="1783080"/>
-            <a:ext cx="10189159" cy="457200"/>
+            <a:off x="1344168" y="1728216"/>
+            <a:ext cx="10189159" cy="530352"/>
           </a:xfrm>
           <a:prstGeom prst="rect">
             <a:avLst/>
@@ -9413,7 +9413,7 @@
         </p:nvSpPr>
         <p:spPr>
           <a:xfrm>
-            <a:off x="658368" y="2267712"/>
+            <a:off x="658368" y="2276856"/>
             <a:ext cx="10874959" cy="9525"/>
           </a:xfrm>
           <a:prstGeom prst="rect">
@@ -9457,8 +9457,8 @@
         </p:nvSpPr>
         <p:spPr>
           <a:xfrm>
-            <a:off x="658368" y="2368296"/>
-            <a:ext cx="502920" cy="457200"/>
+            <a:off x="658368" y="2331720"/>
+            <a:ext cx="502920" cy="530352"/>
           </a:xfrm>
           <a:prstGeom prst="rect">
             <a:avLst/>
@@ -9499,8 +9499,8 @@
         </p:nvSpPr>
         <p:spPr>
           <a:xfrm>
-            <a:off x="1344168" y="2386584"/>
-            <a:ext cx="10189159" cy="457200"/>
+            <a:off x="1344168" y="2331720"/>
+            <a:ext cx="10189159" cy="530352"/>
           </a:xfrm>
           <a:prstGeom prst="rect">
             <a:avLst/>
@@ -9541,7 +9541,7 @@
         </p:nvSpPr>
         <p:spPr>
           <a:xfrm>
-            <a:off x="658368" y="2871216"/>
+            <a:off x="658368" y="2880360"/>
             <a:ext cx="10874959" cy="9525"/>
           </a:xfrm>
           <a:prstGeom prst="rect">
@@ -9585,8 +9585,8 @@
         </p:nvSpPr>
         <p:spPr>
           <a:xfrm>
-            <a:off x="658368" y="2971800"/>
-            <a:ext cx="502920" cy="457200"/>
+            <a:off x="658368" y="2935224"/>
+            <a:ext cx="502920" cy="530352"/>
           </a:xfrm>
           <a:prstGeom prst="rect">
             <a:avLst/>
@@ -9627,8 +9627,8 @@
         </p:nvSpPr>
         <p:spPr>
           <a:xfrm>
-            <a:off x="1344168" y="2990088"/>
-            <a:ext cx="10189159" cy="457200"/>
+            <a:off x="1344168" y="2935224"/>
+            <a:ext cx="10189159" cy="530352"/>
           </a:xfrm>
           <a:prstGeom prst="rect">
             <a:avLst/>
@@ -9669,7 +9669,7 @@
         </p:nvSpPr>
         <p:spPr>
           <a:xfrm>
-            <a:off x="658368" y="3474720"/>
+            <a:off x="658368" y="3483864"/>
             <a:ext cx="10874959" cy="9525"/>
           </a:xfrm>
           <a:prstGeom prst="rect">
@@ -9713,8 +9713,8 @@
         </p:nvSpPr>
         <p:spPr>
           <a:xfrm>
-            <a:off x="658368" y="3575304"/>
-            <a:ext cx="502920" cy="457200"/>
+            <a:off x="658368" y="3538728"/>
+            <a:ext cx="502920" cy="530352"/>
           </a:xfrm>
           <a:prstGeom prst="rect">
             <a:avLst/>
@@ -9755,8 +9755,8 @@
         </p:nvSpPr>
         <p:spPr>
           <a:xfrm>
-            <a:off x="1344168" y="3593592"/>
-            <a:ext cx="10189159" cy="457200"/>
+            <a:off x="1344168" y="3538728"/>
+            <a:ext cx="10189159" cy="530352"/>
           </a:xfrm>
           <a:prstGeom prst="rect">
             <a:avLst/>
@@ -9797,7 +9797,7 @@
         </p:nvSpPr>
         <p:spPr>
           <a:xfrm>
-            <a:off x="658368" y="4078224"/>
+            <a:off x="658368" y="4087368"/>
             <a:ext cx="10874959" cy="9525"/>
           </a:xfrm>
           <a:prstGeom prst="rect">
@@ -9841,8 +9841,8 @@
         </p:nvSpPr>
         <p:spPr>
           <a:xfrm>
-            <a:off x="658368" y="4178808"/>
-            <a:ext cx="502920" cy="457200"/>
+            <a:off x="658368" y="4142232"/>
+            <a:ext cx="502920" cy="530352"/>
           </a:xfrm>
           <a:prstGeom prst="rect">
             <a:avLst/>
@@ -9883,8 +9883,8 @@
         </p:nvSpPr>
         <p:spPr>
           <a:xfrm>
-            <a:off x="1344168" y="4197096"/>
-            <a:ext cx="10189159" cy="457200"/>
+            <a:off x="1344168" y="4142232"/>
+            <a:ext cx="10189159" cy="530352"/>
           </a:xfrm>
           <a:prstGeom prst="rect">
             <a:avLst/>
@@ -9925,7 +9925,7 @@
         </p:nvSpPr>
         <p:spPr>
           <a:xfrm>
-            <a:off x="658368" y="4681728"/>
+            <a:off x="658368" y="4690872"/>
             <a:ext cx="10874959" cy="9525"/>
           </a:xfrm>
           <a:prstGeom prst="rect">
@@ -9969,8 +9969,8 @@
         </p:nvSpPr>
         <p:spPr>
           <a:xfrm>
-            <a:off x="658368" y="4782312"/>
-            <a:ext cx="502920" cy="457200"/>
+            <a:off x="658368" y="4745736"/>
+            <a:ext cx="502920" cy="530352"/>
           </a:xfrm>
           <a:prstGeom prst="rect">
             <a:avLst/>
@@ -10011,8 +10011,8 @@
         </p:nvSpPr>
         <p:spPr>
           <a:xfrm>
-            <a:off x="1344168" y="4800600"/>
-            <a:ext cx="10189159" cy="457200"/>
+            <a:off x="1344168" y="4745736"/>
+            <a:ext cx="10189159" cy="530352"/>
           </a:xfrm>
           <a:prstGeom prst="rect">
             <a:avLst/>
@@ -10053,7 +10053,7 @@
         </p:nvSpPr>
         <p:spPr>
           <a:xfrm>
-            <a:off x="658368" y="5285232"/>
+            <a:off x="658368" y="5294376"/>
             <a:ext cx="10874959" cy="9525"/>
           </a:xfrm>
           <a:prstGeom prst="rect">
@@ -10097,8 +10097,8 @@
         </p:nvSpPr>
         <p:spPr>
           <a:xfrm>
-            <a:off x="658368" y="5495544"/>
-            <a:ext cx="10874959" cy="457200"/>
+            <a:off x="658368" y="5422392"/>
+            <a:ext cx="10874959" cy="411480"/>
           </a:xfrm>
           <a:prstGeom prst="rect">
             <a:avLst/>
@@ -10120,7 +10120,7 @@
               </a:spcAft>
             </a:pPr>
             <a:r>
-              <a:rPr sz="1400" b="0" i="1">
+              <a:rPr sz="1300" b="0" i="1">
                 <a:solidFill>
                   <a:srgbClr val="5A6375"/>
                 </a:solidFill>
